--- a/desrosiers Lucas /Projet MELAINA (abeille) 2/les fichier du mindview/Contexte et Contrainte.pptx
+++ b/desrosiers Lucas /Projet MELAINA (abeille) 2/les fichier du mindview/Contexte et Contrainte.pptx
@@ -7,7 +7,6 @@
   <p:sldIdLst>
     <p:sldId id="256" r:id="rId2"/>
     <p:sldId id="257" r:id="rId3"/>
-    <p:sldId id="258" r:id="rId4"/>
   </p:sldIdLst>
   <p:sldSz cx="12192000" cy="6858000"/>
   <p:notesSz cx="6858000" cy="9144000"/>
@@ -106,6 +105,11 @@
       </a:defRPr>
     </a:lvl9pPr>
   </p:defaultTextStyle>
+  <p:extLst>
+    <p:ext uri="{EFAFB233-063F-42B5-8137-9DF3F51BA10A}">
+      <p15:sldGuideLst xmlns:p15="http://schemas.microsoft.com/office/powerpoint/2012/main"/>
+    </p:ext>
+  </p:extLst>
 </p:presentation>
 </file>
 
@@ -256,7 +260,7 @@
           <a:p>
             <a:fld id="{3F35FE8C-61B7-564F-8450-28EBC30F37B0}" type="datetimeFigureOut">
               <a:rPr lang="fr-FR" smtClean="0"/>
-              <a:t>23/02/2026</a:t>
+              <a:t>01/06/2026</a:t>
             </a:fld>
             <a:endParaRPr lang="fr-FR"/>
           </a:p>
@@ -454,7 +458,7 @@
           <a:p>
             <a:fld id="{3F35FE8C-61B7-564F-8450-28EBC30F37B0}" type="datetimeFigureOut">
               <a:rPr lang="fr-FR" smtClean="0"/>
-              <a:t>23/02/2026</a:t>
+              <a:t>01/06/2026</a:t>
             </a:fld>
             <a:endParaRPr lang="fr-FR"/>
           </a:p>
@@ -662,7 +666,7 @@
           <a:p>
             <a:fld id="{3F35FE8C-61B7-564F-8450-28EBC30F37B0}" type="datetimeFigureOut">
               <a:rPr lang="fr-FR" smtClean="0"/>
-              <a:t>23/02/2026</a:t>
+              <a:t>01/06/2026</a:t>
             </a:fld>
             <a:endParaRPr lang="fr-FR"/>
           </a:p>
@@ -860,7 +864,7 @@
           <a:p>
             <a:fld id="{3F35FE8C-61B7-564F-8450-28EBC30F37B0}" type="datetimeFigureOut">
               <a:rPr lang="fr-FR" smtClean="0"/>
-              <a:t>23/02/2026</a:t>
+              <a:t>01/06/2026</a:t>
             </a:fld>
             <a:endParaRPr lang="fr-FR"/>
           </a:p>
@@ -1135,7 +1139,7 @@
           <a:p>
             <a:fld id="{3F35FE8C-61B7-564F-8450-28EBC30F37B0}" type="datetimeFigureOut">
               <a:rPr lang="fr-FR" smtClean="0"/>
-              <a:t>23/02/2026</a:t>
+              <a:t>01/06/2026</a:t>
             </a:fld>
             <a:endParaRPr lang="fr-FR"/>
           </a:p>
@@ -1400,7 +1404,7 @@
           <a:p>
             <a:fld id="{3F35FE8C-61B7-564F-8450-28EBC30F37B0}" type="datetimeFigureOut">
               <a:rPr lang="fr-FR" smtClean="0"/>
-              <a:t>23/02/2026</a:t>
+              <a:t>01/06/2026</a:t>
             </a:fld>
             <a:endParaRPr lang="fr-FR"/>
           </a:p>
@@ -1812,7 +1816,7 @@
           <a:p>
             <a:fld id="{3F35FE8C-61B7-564F-8450-28EBC30F37B0}" type="datetimeFigureOut">
               <a:rPr lang="fr-FR" smtClean="0"/>
-              <a:t>23/02/2026</a:t>
+              <a:t>01/06/2026</a:t>
             </a:fld>
             <a:endParaRPr lang="fr-FR"/>
           </a:p>
@@ -1953,7 +1957,7 @@
           <a:p>
             <a:fld id="{3F35FE8C-61B7-564F-8450-28EBC30F37B0}" type="datetimeFigureOut">
               <a:rPr lang="fr-FR" smtClean="0"/>
-              <a:t>23/02/2026</a:t>
+              <a:t>01/06/2026</a:t>
             </a:fld>
             <a:endParaRPr lang="fr-FR"/>
           </a:p>
@@ -2066,7 +2070,7 @@
           <a:p>
             <a:fld id="{3F35FE8C-61B7-564F-8450-28EBC30F37B0}" type="datetimeFigureOut">
               <a:rPr lang="fr-FR" smtClean="0"/>
-              <a:t>23/02/2026</a:t>
+              <a:t>01/06/2026</a:t>
             </a:fld>
             <a:endParaRPr lang="fr-FR"/>
           </a:p>
@@ -2377,7 +2381,7 @@
           <a:p>
             <a:fld id="{3F35FE8C-61B7-564F-8450-28EBC30F37B0}" type="datetimeFigureOut">
               <a:rPr lang="fr-FR" smtClean="0"/>
-              <a:t>23/02/2026</a:t>
+              <a:t>01/06/2026</a:t>
             </a:fld>
             <a:endParaRPr lang="fr-FR"/>
           </a:p>
@@ -2665,7 +2669,7 @@
           <a:p>
             <a:fld id="{3F35FE8C-61B7-564F-8450-28EBC30F37B0}" type="datetimeFigureOut">
               <a:rPr lang="fr-FR" smtClean="0"/>
-              <a:t>23/02/2026</a:t>
+              <a:t>01/06/2026</a:t>
             </a:fld>
             <a:endParaRPr lang="fr-FR"/>
           </a:p>
@@ -2906,7 +2910,7 @@
           <a:p>
             <a:fld id="{3F35FE8C-61B7-564F-8450-28EBC30F37B0}" type="datetimeFigureOut">
               <a:rPr lang="fr-FR" smtClean="0"/>
-              <a:t>23/02/2026</a:t>
+              <a:t>01/06/2026</a:t>
             </a:fld>
             <a:endParaRPr lang="fr-FR"/>
           </a:p>
@@ -3426,66 +3430,6 @@
 </p:sld>
 </file>
 
-<file path=ppt/slides/slide3.xml><?xml version="1.0" encoding="utf-8"?>
-<p:sld xmlns:a="http://schemas.openxmlformats.org/drawingml/2006/main" xmlns:r="http://schemas.openxmlformats.org/officeDocument/2006/relationships" xmlns:p="http://schemas.openxmlformats.org/presentationml/2006/main">
-  <p:cSld>
-    <p:spTree>
-      <p:nvGrpSpPr>
-        <p:cNvPr id="1" name=""/>
-        <p:cNvGrpSpPr/>
-        <p:nvPr/>
-      </p:nvGrpSpPr>
-      <p:grpSpPr>
-        <a:xfrm>
-          <a:off x="0" y="0"/>
-          <a:ext cx="0" cy="0"/>
-          <a:chOff x="0" y="0"/>
-          <a:chExt cx="0" cy="0"/>
-        </a:xfrm>
-      </p:grpSpPr>
-      <p:pic>
-        <p:nvPicPr>
-          <p:cNvPr id="5" name="Image 4">
-            <a:extLst>
-              <a:ext uri="{FF2B5EF4-FFF2-40B4-BE49-F238E27FC236}">
-                <a16:creationId xmlns:a16="http://schemas.microsoft.com/office/drawing/2014/main" id="{C9EB4C2C-1AD3-5394-7100-59C236A7793D}"/>
-              </a:ext>
-            </a:extLst>
-          </p:cNvPr>
-          <p:cNvPicPr>
-            <a:picLocks noChangeAspect="1"/>
-          </p:cNvPicPr>
-          <p:nvPr/>
-        </p:nvPicPr>
-        <p:blipFill>
-          <a:blip r:embed="rId2"/>
-          <a:stretch>
-            <a:fillRect/>
-          </a:stretch>
-        </p:blipFill>
-        <p:spPr>
-          <a:xfrm>
-            <a:off x="0" y="0"/>
-            <a:ext cx="12177970" cy="6647935"/>
-          </a:xfrm>
-          <a:prstGeom prst="rect">
-            <a:avLst/>
-          </a:prstGeom>
-        </p:spPr>
-      </p:pic>
-    </p:spTree>
-    <p:extLst>
-      <p:ext uri="{BB962C8B-B14F-4D97-AF65-F5344CB8AC3E}">
-        <p14:creationId xmlns:p14="http://schemas.microsoft.com/office/powerpoint/2010/main" val="1415457255"/>
-      </p:ext>
-    </p:extLst>
-  </p:cSld>
-  <p:clrMapOvr>
-    <a:masterClrMapping/>
-  </p:clrMapOvr>
-</p:sld>
-</file>
-
 <file path=ppt/theme/theme1.xml><?xml version="1.0" encoding="utf-8"?>
 <a:theme xmlns:a="http://schemas.openxmlformats.org/drawingml/2006/main" name="Thème Office">
   <a:themeElements>
